--- a/a7/build/out/u6/A7 6.T1 Angle Pairs Supplementary, Complementary, Vertical, Adjacent - Slides.pptx
+++ b/a7/build/out/u6/A7 6.T1 Angle Pairs Supplementary, Complementary, Vertical, Adjacent - Slides.pptx
@@ -5153,7 +5153,7 @@
       </p:pic>
       <p:pic>
         <p:nvPicPr>
-          <p:cNvPr id="9" name="Picture 8" descr="adcc8f1246fa2193.png"/>
+          <p:cNvPr id="9" name="Picture 8" descr="def7740143bebf68.png"/>
           <p:cNvPicPr>
             <a:picLocks noChangeAspect="1"/>
           </p:cNvPicPr>
@@ -5168,7 +5168,7 @@
         <p:spPr>
           <a:xfrm>
             <a:off x="1828800" y="2471928"/>
-            <a:ext cx="2737104" cy="347472"/>
+            <a:ext cx="1941576" cy="277368"/>
           </a:xfrm>
           <a:prstGeom prst="rect">
             <a:avLst/>
@@ -5177,7 +5177,7 @@
       </p:pic>
       <p:pic>
         <p:nvPicPr>
-          <p:cNvPr id="10" name="Picture 9" descr="6f95e2cb60145c30.png"/>
+          <p:cNvPr id="10" name="Picture 9" descr="adcc8f1246fa2193.png"/>
           <p:cNvPicPr>
             <a:picLocks noChangeAspect="1"/>
           </p:cNvPicPr>
@@ -5191,7 +5191,31 @@
         </p:blipFill>
         <p:spPr>
           <a:xfrm>
-            <a:off x="1828800" y="3093719"/>
+            <a:off x="1828800" y="3023615"/>
+            <a:ext cx="2737104" cy="347472"/>
+          </a:xfrm>
+          <a:prstGeom prst="rect">
+            <a:avLst/>
+          </a:prstGeom>
+        </p:spPr>
+      </p:pic>
+      <p:pic>
+        <p:nvPicPr>
+          <p:cNvPr id="11" name="Picture 10" descr="6f95e2cb60145c30.png"/>
+          <p:cNvPicPr>
+            <a:picLocks noChangeAspect="1"/>
+          </p:cNvPicPr>
+          <p:nvPr/>
+        </p:nvPicPr>
+        <p:blipFill>
+          <a:blip r:embed="rId5"/>
+          <a:stretch>
+            <a:fillRect/>
+          </a:stretch>
+        </p:blipFill>
+        <p:spPr>
+          <a:xfrm>
+            <a:off x="1828800" y="3645407"/>
             <a:ext cx="2456688" cy="350520"/>
           </a:xfrm>
           <a:prstGeom prst="rect">
@@ -5201,7 +5225,7 @@
       </p:pic>
       <p:sp>
         <p:nvSpPr>
-          <p:cNvPr id="11" name="TextBox 10"/>
+          <p:cNvPr id="12" name="TextBox 11"/>
           <p:cNvSpPr txBox="1"/>
           <p:nvPr/>
         </p:nvSpPr>
@@ -6074,8 +6098,8 @@
         </p:nvSpPr>
         <p:spPr>
           <a:xfrm>
-            <a:off x="3228603" y="2875390"/>
-            <a:ext cx="3776266" cy="457200"/>
+            <a:off x="3700968" y="2875390"/>
+            <a:ext cx="3429418" cy="457200"/>
           </a:xfrm>
           <a:prstGeom prst="rect">
             <a:avLst/>
@@ -6096,14 +6120,49 @@
                 </a:solidFill>
                 <a:latin typeface="Lexend"/>
               </a:rPr>
-              <a:t>equal:  4x + 3 = x + 39,   </a:t>
+              <a:t>equal:  4x + 3 = x + 39</a:t>
+            </a:r>
+          </a:p>
+        </p:txBody>
+      </p:sp>
+      <p:sp>
+        <p:nvSpPr>
+          <p:cNvPr id="15" name="TextBox 14"/>
+          <p:cNvSpPr txBox="1"/>
+          <p:nvPr/>
+        </p:nvSpPr>
+        <p:spPr>
+          <a:xfrm>
+            <a:off x="3700968" y="3378310"/>
+            <a:ext cx="3554909" cy="457200"/>
+          </a:xfrm>
+          <a:prstGeom prst="rect">
+            <a:avLst/>
+          </a:prstGeom>
+          <a:noFill/>
+        </p:spPr>
+        <p:txBody>
+          <a:bodyPr wrap="none" lIns="45720" rIns="45720" tIns="18288" bIns="18288" anchor="ctr">
+            <a:noAutofit/>
+          </a:bodyPr>
+          <a:lstStyle/>
+          <a:p>
+            <a:pPr algn="l"/>
+            <a:r>
+              <a:rPr sz="2330" b="0" i="0">
+                <a:solidFill>
+                  <a:srgbClr val="1A1A1A"/>
+                </a:solidFill>
+                <a:latin typeface="Lexend"/>
+              </a:rPr>
+              <a:t>take x off both sides:  </a:t>
             </a:r>
           </a:p>
         </p:txBody>
       </p:sp>
       <p:pic>
         <p:nvPicPr>
-          <p:cNvPr id="15" name="Picture 14" descr="37b2e35864da63be.png"/>
+          <p:cNvPr id="16" name="Picture 15" descr="2ab8632a630df2cf.png"/>
           <p:cNvPicPr>
             <a:picLocks noChangeAspect="1"/>
           </p:cNvPicPr>
@@ -6117,52 +6176,17 @@
         </p:blipFill>
         <p:spPr>
           <a:xfrm>
-            <a:off x="6867710" y="3010645"/>
-            <a:ext cx="907780" cy="214693"/>
+            <a:off x="7118717" y="3513565"/>
+            <a:ext cx="1344168" cy="214693"/>
           </a:xfrm>
           <a:prstGeom prst="rect">
             <a:avLst/>
           </a:prstGeom>
         </p:spPr>
       </p:pic>
-      <p:sp>
-        <p:nvSpPr>
-          <p:cNvPr id="16" name="TextBox 15"/>
-          <p:cNvSpPr txBox="1"/>
-          <p:nvPr/>
-        </p:nvSpPr>
-        <p:spPr>
-          <a:xfrm>
-            <a:off x="7775490" y="2875390"/>
-            <a:ext cx="557160" cy="457200"/>
-          </a:xfrm>
-          <a:prstGeom prst="rect">
-            <a:avLst/>
-          </a:prstGeom>
-          <a:noFill/>
-        </p:spPr>
-        <p:txBody>
-          <a:bodyPr wrap="none" lIns="45720" rIns="45720" tIns="18288" bIns="18288" anchor="ctr">
-            <a:noAutofit/>
-          </a:bodyPr>
-          <a:lstStyle/>
-          <a:p>
-            <a:pPr algn="l"/>
-            <a:r>
-              <a:rPr sz="2330" b="0" i="0">
-                <a:solidFill>
-                  <a:srgbClr val="1A1A1A"/>
-                </a:solidFill>
-                <a:latin typeface="Lexend"/>
-              </a:rPr>
-              <a:t>,   </a:t>
-            </a:r>
-          </a:p>
-        </p:txBody>
-      </p:sp>
       <p:pic>
         <p:nvPicPr>
-          <p:cNvPr id="17" name="Picture 16" descr="449ed3ef3863c3a5.png"/>
+          <p:cNvPr id="17" name="Picture 16" descr="68567d5b1bde236a.png"/>
           <p:cNvPicPr>
             <a:picLocks noChangeAspect="1"/>
           </p:cNvPicPr>
@@ -6176,17 +6200,52 @@
         </p:blipFill>
         <p:spPr>
           <a:xfrm>
-            <a:off x="8195491" y="3010645"/>
-            <a:ext cx="739759" cy="210026"/>
+            <a:off x="3755832" y="4016199"/>
+            <a:ext cx="905256" cy="213360"/>
           </a:xfrm>
           <a:prstGeom prst="rect">
             <a:avLst/>
           </a:prstGeom>
         </p:spPr>
       </p:pic>
+      <p:sp>
+        <p:nvSpPr>
+          <p:cNvPr id="18" name="TextBox 17"/>
+          <p:cNvSpPr txBox="1"/>
+          <p:nvPr/>
+        </p:nvSpPr>
+        <p:spPr>
+          <a:xfrm>
+            <a:off x="4661088" y="3881230"/>
+            <a:ext cx="557160" cy="457200"/>
+          </a:xfrm>
+          <a:prstGeom prst="rect">
+            <a:avLst/>
+          </a:prstGeom>
+          <a:noFill/>
+        </p:spPr>
+        <p:txBody>
+          <a:bodyPr wrap="none" lIns="45720" rIns="45720" tIns="18288" bIns="18288" anchor="ctr">
+            <a:noAutofit/>
+          </a:bodyPr>
+          <a:lstStyle/>
+          <a:p>
+            <a:pPr algn="l"/>
+            <a:r>
+              <a:rPr sz="2330" b="0" i="0">
+                <a:solidFill>
+                  <a:srgbClr val="1A1A1A"/>
+                </a:solidFill>
+                <a:latin typeface="Lexend"/>
+              </a:rPr>
+              <a:t>,   </a:t>
+            </a:r>
+          </a:p>
+        </p:txBody>
+      </p:sp>
       <p:pic>
         <p:nvPicPr>
-          <p:cNvPr id="18" name="Picture 17" descr="0992bbe3f2b5413d.png"/>
+          <p:cNvPr id="19" name="Picture 18" descr="c9ab79e3ddc85027.png"/>
           <p:cNvPicPr>
             <a:picLocks noChangeAspect="1"/>
           </p:cNvPicPr>
@@ -6200,7 +6259,31 @@
         </p:blipFill>
         <p:spPr>
           <a:xfrm>
-            <a:off x="3283467" y="3516327"/>
+            <a:off x="5081089" y="4016199"/>
+            <a:ext cx="743712" cy="210312"/>
+          </a:xfrm>
+          <a:prstGeom prst="rect">
+            <a:avLst/>
+          </a:prstGeom>
+        </p:spPr>
+      </p:pic>
+      <p:pic>
+        <p:nvPicPr>
+          <p:cNvPr id="20" name="Picture 19" descr="0992bbe3f2b5413d.png"/>
+          <p:cNvPicPr>
+            <a:picLocks noChangeAspect="1"/>
+          </p:cNvPicPr>
+          <p:nvPr/>
+        </p:nvPicPr>
+        <p:blipFill>
+          <a:blip r:embed="rId7"/>
+          <a:stretch>
+            <a:fillRect/>
+          </a:stretch>
+        </p:blipFill>
+        <p:spPr>
+          <a:xfrm>
+            <a:off x="3755832" y="4522167"/>
             <a:ext cx="1716024" cy="265176"/>
           </a:xfrm>
           <a:prstGeom prst="rect">
@@ -6210,13 +6293,13 @@
       </p:pic>
       <p:sp>
         <p:nvSpPr>
-          <p:cNvPr id="19" name="TextBox 18"/>
-          <p:cNvSpPr txBox="1"/>
-          <p:nvPr/>
-        </p:nvSpPr>
-        <p:spPr>
-          <a:xfrm>
-            <a:off x="777240" y="4572000"/>
+          <p:cNvPr id="21" name="TextBox 20"/>
+          <p:cNvSpPr txBox="1"/>
+          <p:nvPr/>
+        </p:nvSpPr>
+        <p:spPr>
+          <a:xfrm>
+            <a:off x="777240" y="4955650"/>
             <a:ext cx="10607040" cy="548640"/>
           </a:xfrm>
           <a:prstGeom prst="rect">
@@ -9029,16 +9112,287 @@
           </a:p>
         </p:txBody>
       </p:sp>
-      <p:sp>
-        <p:nvSpPr>
-          <p:cNvPr id="8" name="TextBox 7"/>
-          <p:cNvSpPr txBox="1"/>
-          <p:nvPr/>
-        </p:nvSpPr>
-        <p:spPr>
-          <a:xfrm>
-            <a:off x="1234440" y="1874519"/>
-            <a:ext cx="10058400" cy="858740"/>
+      <p:pic>
+        <p:nvPicPr>
+          <p:cNvPr id="8" name="Picture 7" descr="ebbb07ffc24a4d45.png"/>
+          <p:cNvPicPr>
+            <a:picLocks noChangeAspect="1"/>
+          </p:cNvPicPr>
+          <p:nvPr/>
+        </p:nvPicPr>
+        <p:blipFill>
+          <a:blip r:embed="rId2"/>
+          <a:stretch>
+            <a:fillRect/>
+          </a:stretch>
+        </p:blipFill>
+        <p:spPr>
+          <a:xfrm>
+            <a:off x="1234440" y="1974151"/>
+            <a:ext cx="393763" cy="220408"/>
+          </a:xfrm>
+          <a:prstGeom prst="rect">
+            <a:avLst/>
+          </a:prstGeom>
+        </p:spPr>
+      </p:pic>
+      <p:sp>
+        <p:nvSpPr>
+          <p:cNvPr id="9" name="TextBox 8"/>
+          <p:cNvSpPr txBox="1"/>
+          <p:nvPr/>
+        </p:nvSpPr>
+        <p:spPr>
+          <a:xfrm>
+            <a:off x="1628203" y="1851660"/>
+            <a:ext cx="1004622" cy="457200"/>
+          </a:xfrm>
+          <a:prstGeom prst="rect">
+            <a:avLst/>
+          </a:prstGeom>
+          <a:noFill/>
+        </p:spPr>
+        <p:txBody>
+          <a:bodyPr wrap="none" lIns="45720" rIns="45720" tIns="18288" bIns="18288" anchor="ctr">
+            <a:noAutofit/>
+          </a:bodyPr>
+          <a:lstStyle/>
+          <a:p>
+            <a:pPr algn="l"/>
+            <a:r>
+              <a:rPr sz="2280" b="1" i="0">
+                <a:solidFill>
+                  <a:srgbClr val="1A1A1A"/>
+                </a:solidFill>
+                <a:latin typeface="Lexend"/>
+              </a:rPr>
+              <a:t> and </a:t>
+            </a:r>
+          </a:p>
+        </p:txBody>
+      </p:sp>
+      <p:pic>
+        <p:nvPicPr>
+          <p:cNvPr id="10" name="Picture 9" descr="77b1c730618540a5.png"/>
+          <p:cNvPicPr>
+            <a:picLocks noChangeAspect="1"/>
+          </p:cNvPicPr>
+          <p:nvPr/>
+        </p:nvPicPr>
+        <p:blipFill>
+          <a:blip r:embed="rId3"/>
+          <a:stretch>
+            <a:fillRect/>
+          </a:stretch>
+        </p:blipFill>
+        <p:spPr>
+          <a:xfrm>
+            <a:off x="2495666" y="1971675"/>
+            <a:ext cx="438340" cy="257556"/>
+          </a:xfrm>
+          <a:prstGeom prst="rect">
+            <a:avLst/>
+          </a:prstGeom>
+        </p:spPr>
+      </p:pic>
+      <p:sp>
+        <p:nvSpPr>
+          <p:cNvPr id="11" name="TextBox 10"/>
+          <p:cNvSpPr txBox="1"/>
+          <p:nvPr/>
+        </p:nvSpPr>
+        <p:spPr>
+          <a:xfrm>
+            <a:off x="2934006" y="1851660"/>
+            <a:ext cx="4258698" cy="457200"/>
+          </a:xfrm>
+          <a:prstGeom prst="rect">
+            <a:avLst/>
+          </a:prstGeom>
+          <a:noFill/>
+        </p:spPr>
+        <p:txBody>
+          <a:bodyPr wrap="none" lIns="45720" rIns="45720" tIns="18288" bIns="18288" anchor="ctr">
+            <a:noAutofit/>
+          </a:bodyPr>
+          <a:lstStyle/>
+          <a:p>
+            <a:pPr algn="l"/>
+            <a:r>
+              <a:rPr sz="2280" b="1" i="0">
+                <a:solidFill>
+                  <a:srgbClr val="1A1A1A"/>
+                </a:solidFill>
+                <a:latin typeface="Lexend"/>
+              </a:rPr>
+              <a:t> are complementary, and </a:t>
+            </a:r>
+          </a:p>
+        </p:txBody>
+      </p:sp>
+      <p:pic>
+        <p:nvPicPr>
+          <p:cNvPr id="12" name="Picture 11" descr="3d67e897ac23496f.png"/>
+          <p:cNvPicPr>
+            <a:picLocks noChangeAspect="1"/>
+          </p:cNvPicPr>
+          <p:nvPr/>
+        </p:nvPicPr>
+        <p:blipFill>
+          <a:blip r:embed="rId4"/>
+          <a:stretch>
+            <a:fillRect/>
+          </a:stretch>
+        </p:blipFill>
+        <p:spPr>
+          <a:xfrm>
+            <a:off x="7055544" y="1971675"/>
+            <a:ext cx="1461135" cy="225361"/>
+          </a:xfrm>
+          <a:prstGeom prst="rect">
+            <a:avLst/>
+          </a:prstGeom>
+        </p:spPr>
+      </p:pic>
+      <p:sp>
+        <p:nvSpPr>
+          <p:cNvPr id="13" name="TextBox 12"/>
+          <p:cNvSpPr txBox="1"/>
+          <p:nvPr/>
+        </p:nvSpPr>
+        <p:spPr>
+          <a:xfrm>
+            <a:off x="8516679" y="1851660"/>
+            <a:ext cx="289193" cy="457200"/>
+          </a:xfrm>
+          <a:prstGeom prst="rect">
+            <a:avLst/>
+          </a:prstGeom>
+          <a:noFill/>
+        </p:spPr>
+        <p:txBody>
+          <a:bodyPr wrap="none" lIns="45720" rIns="45720" tIns="18288" bIns="18288" anchor="ctr">
+            <a:noAutofit/>
+          </a:bodyPr>
+          <a:lstStyle/>
+          <a:p>
+            <a:pPr algn="l"/>
+            <a:r>
+              <a:rPr sz="2280" b="1" i="0">
+                <a:solidFill>
+                  <a:srgbClr val="1A1A1A"/>
+                </a:solidFill>
+                <a:latin typeface="Lexend"/>
+              </a:rPr>
+              <a:t>.</a:t>
+            </a:r>
+          </a:p>
+        </p:txBody>
+      </p:sp>
+      <p:sp>
+        <p:nvSpPr>
+          <p:cNvPr id="14" name="TextBox 13"/>
+          <p:cNvSpPr txBox="1"/>
+          <p:nvPr/>
+        </p:nvSpPr>
+        <p:spPr>
+          <a:xfrm>
+            <a:off x="1234440" y="2464308"/>
+            <a:ext cx="1480659" cy="457200"/>
+          </a:xfrm>
+          <a:prstGeom prst="rect">
+            <a:avLst/>
+          </a:prstGeom>
+          <a:noFill/>
+        </p:spPr>
+        <p:txBody>
+          <a:bodyPr wrap="none" lIns="45720" rIns="45720" tIns="18288" bIns="18288" anchor="ctr">
+            <a:noAutofit/>
+          </a:bodyPr>
+          <a:lstStyle/>
+          <a:p>
+            <a:pPr algn="l"/>
+            <a:r>
+              <a:rPr sz="2280" b="1" i="0">
+                <a:solidFill>
+                  <a:srgbClr val="1A1A1A"/>
+                </a:solidFill>
+                <a:latin typeface="Lexend"/>
+              </a:rPr>
+              <a:t>What is </a:t>
+            </a:r>
+          </a:p>
+        </p:txBody>
+      </p:sp>
+      <p:pic>
+        <p:nvPicPr>
+          <p:cNvPr id="15" name="Picture 14" descr="9aa2e860f902725a.png"/>
+          <p:cNvPicPr>
+            <a:picLocks noChangeAspect="1"/>
+          </p:cNvPicPr>
+          <p:nvPr/>
+        </p:nvPicPr>
+        <p:blipFill>
+          <a:blip r:embed="rId5"/>
+          <a:stretch>
+            <a:fillRect/>
+          </a:stretch>
+        </p:blipFill>
+        <p:spPr>
+          <a:xfrm>
+            <a:off x="2577939" y="2584323"/>
+            <a:ext cx="713232" cy="257556"/>
+          </a:xfrm>
+          <a:prstGeom prst="rect">
+            <a:avLst/>
+          </a:prstGeom>
+        </p:spPr>
+      </p:pic>
+      <p:sp>
+        <p:nvSpPr>
+          <p:cNvPr id="16" name="TextBox 15"/>
+          <p:cNvSpPr txBox="1"/>
+          <p:nvPr/>
+        </p:nvSpPr>
+        <p:spPr>
+          <a:xfrm>
+            <a:off x="3291171" y="2464308"/>
+            <a:ext cx="374819" cy="457200"/>
+          </a:xfrm>
+          <a:prstGeom prst="rect">
+            <a:avLst/>
+          </a:prstGeom>
+          <a:noFill/>
+        </p:spPr>
+        <p:txBody>
+          <a:bodyPr wrap="none" lIns="45720" rIns="45720" tIns="18288" bIns="18288" anchor="ctr">
+            <a:noAutofit/>
+          </a:bodyPr>
+          <a:lstStyle/>
+          <a:p>
+            <a:pPr algn="l"/>
+            <a:r>
+              <a:rPr sz="2280" b="1" i="0">
+                <a:solidFill>
+                  <a:srgbClr val="1A1A1A"/>
+                </a:solidFill>
+                <a:latin typeface="Lexend"/>
+              </a:rPr>
+              <a:t>?</a:t>
+            </a:r>
+          </a:p>
+        </p:txBody>
+      </p:sp>
+      <p:sp>
+        <p:nvSpPr>
+          <p:cNvPr id="17" name="TextBox 16"/>
+          <p:cNvSpPr txBox="1"/>
+          <p:nvPr/>
+        </p:nvSpPr>
+        <p:spPr>
+          <a:xfrm>
+            <a:off x="1874519" y="3236976"/>
+            <a:ext cx="4572000" cy="548640"/>
           </a:xfrm>
           <a:prstGeom prst="rect">
             <a:avLst/>
@@ -9059,20 +9413,29 @@
                 </a:solidFill>
                 <a:latin typeface="Lexend"/>
               </a:rPr>
-              <a:t>Angles P and Q are complementary, and angle P is 28°. What is angle Q?</a:t>
-            </a:r>
-          </a:p>
-        </p:txBody>
-      </p:sp>
-      <p:sp>
-        <p:nvSpPr>
-          <p:cNvPr id="9" name="TextBox 8"/>
-          <p:cNvSpPr txBox="1"/>
-          <p:nvPr/>
-        </p:nvSpPr>
-        <p:spPr>
-          <a:xfrm>
-            <a:off x="1874519" y="2980148"/>
+              <a:t>A.   </a:t>
+            </a:r>
+            <a:r>
+              <a:rPr sz="2280" b="0" i="0">
+                <a:solidFill>
+                  <a:srgbClr val="1A1A1A"/>
+                </a:solidFill>
+                <a:latin typeface="Lexend"/>
+              </a:rPr>
+              <a:t>152°</a:t>
+            </a:r>
+          </a:p>
+        </p:txBody>
+      </p:sp>
+      <p:sp>
+        <p:nvSpPr>
+          <p:cNvPr id="18" name="TextBox 17"/>
+          <p:cNvSpPr txBox="1"/>
+          <p:nvPr/>
+        </p:nvSpPr>
+        <p:spPr>
+          <a:xfrm>
+            <a:off x="6629400" y="3236976"/>
             <a:ext cx="4572000" cy="548640"/>
           </a:xfrm>
           <a:prstGeom prst="rect">
@@ -9094,7 +9457,7 @@
                 </a:solidFill>
                 <a:latin typeface="Lexend"/>
               </a:rPr>
-              <a:t>A.   </a:t>
+              <a:t>B.   </a:t>
             </a:r>
             <a:r>
               <a:rPr sz="2280" b="0" i="0">
@@ -9103,20 +9466,20 @@
                 </a:solidFill>
                 <a:latin typeface="Lexend"/>
               </a:rPr>
-              <a:t>152°</a:t>
-            </a:r>
-          </a:p>
-        </p:txBody>
-      </p:sp>
-      <p:sp>
-        <p:nvSpPr>
-          <p:cNvPr id="10" name="TextBox 9"/>
-          <p:cNvSpPr txBox="1"/>
-          <p:nvPr/>
-        </p:nvSpPr>
-        <p:spPr>
-          <a:xfrm>
-            <a:off x="6629400" y="2980148"/>
+              <a:t>62°</a:t>
+            </a:r>
+          </a:p>
+        </p:txBody>
+      </p:sp>
+      <p:sp>
+        <p:nvSpPr>
+          <p:cNvPr id="19" name="TextBox 18"/>
+          <p:cNvSpPr txBox="1"/>
+          <p:nvPr/>
+        </p:nvSpPr>
+        <p:spPr>
+          <a:xfrm>
+            <a:off x="1874519" y="3922776"/>
             <a:ext cx="4572000" cy="548640"/>
           </a:xfrm>
           <a:prstGeom prst="rect">
@@ -9138,7 +9501,7 @@
                 </a:solidFill>
                 <a:latin typeface="Lexend"/>
               </a:rPr>
-              <a:t>B.   </a:t>
+              <a:t>C.   </a:t>
             </a:r>
             <a:r>
               <a:rPr sz="2280" b="0" i="0">
@@ -9147,20 +9510,20 @@
                 </a:solidFill>
                 <a:latin typeface="Lexend"/>
               </a:rPr>
-              <a:t>62°</a:t>
-            </a:r>
-          </a:p>
-        </p:txBody>
-      </p:sp>
-      <p:sp>
-        <p:nvSpPr>
-          <p:cNvPr id="11" name="TextBox 10"/>
-          <p:cNvSpPr txBox="1"/>
-          <p:nvPr/>
-        </p:nvSpPr>
-        <p:spPr>
-          <a:xfrm>
-            <a:off x="1874519" y="3665948"/>
+              <a:t>28°</a:t>
+            </a:r>
+          </a:p>
+        </p:txBody>
+      </p:sp>
+      <p:sp>
+        <p:nvSpPr>
+          <p:cNvPr id="20" name="TextBox 19"/>
+          <p:cNvSpPr txBox="1"/>
+          <p:nvPr/>
+        </p:nvSpPr>
+        <p:spPr>
+          <a:xfrm>
+            <a:off x="6629400" y="3922776"/>
             <a:ext cx="4572000" cy="548640"/>
           </a:xfrm>
           <a:prstGeom prst="rect">
@@ -9182,7 +9545,7 @@
                 </a:solidFill>
                 <a:latin typeface="Lexend"/>
               </a:rPr>
-              <a:t>C.   </a:t>
+              <a:t>D.   </a:t>
             </a:r>
             <a:r>
               <a:rPr sz="2280" b="0" i="0">
@@ -9191,50 +9554,6 @@
                 </a:solidFill>
                 <a:latin typeface="Lexend"/>
               </a:rPr>
-              <a:t>28°</a:t>
-            </a:r>
-          </a:p>
-        </p:txBody>
-      </p:sp>
-      <p:sp>
-        <p:nvSpPr>
-          <p:cNvPr id="12" name="TextBox 11"/>
-          <p:cNvSpPr txBox="1"/>
-          <p:nvPr/>
-        </p:nvSpPr>
-        <p:spPr>
-          <a:xfrm>
-            <a:off x="6629400" y="3665948"/>
-            <a:ext cx="4572000" cy="548640"/>
-          </a:xfrm>
-          <a:prstGeom prst="rect">
-            <a:avLst/>
-          </a:prstGeom>
-          <a:noFill/>
-        </p:spPr>
-        <p:txBody>
-          <a:bodyPr wrap="square" lIns="45720" rIns="45720" tIns="18288" bIns="18288" anchor="t">
-            <a:spAutoFit/>
-          </a:bodyPr>
-          <a:lstStyle/>
-          <a:p>
-            <a:pPr algn="l"/>
-            <a:r>
-              <a:rPr sz="2280" b="1" i="0">
-                <a:solidFill>
-                  <a:srgbClr val="1A1A1A"/>
-                </a:solidFill>
-                <a:latin typeface="Lexend"/>
-              </a:rPr>
-              <a:t>D.   </a:t>
-            </a:r>
-            <a:r>
-              <a:rPr sz="2280" b="0" i="0">
-                <a:solidFill>
-                  <a:srgbClr val="1A1A1A"/>
-                </a:solidFill>
-                <a:latin typeface="Lexend"/>
-              </a:rPr>
               <a:t>118°</a:t>
             </a:r>
           </a:p>
@@ -9242,13 +9561,13 @@
       </p:sp>
       <p:sp>
         <p:nvSpPr>
-          <p:cNvPr id="13" name="TextBox 12"/>
-          <p:cNvSpPr txBox="1"/>
-          <p:nvPr/>
-        </p:nvSpPr>
-        <p:spPr>
-          <a:xfrm>
-            <a:off x="777240" y="4671788"/>
+          <p:cNvPr id="21" name="TextBox 20"/>
+          <p:cNvSpPr txBox="1"/>
+          <p:nvPr/>
+        </p:nvSpPr>
+        <p:spPr>
+          <a:xfrm>
+            <a:off x="777240" y="4928616"/>
             <a:ext cx="10607040" cy="457200"/>
           </a:xfrm>
           <a:prstGeom prst="rect">
@@ -9503,44 +9822,9 @@
           </a:p>
         </p:txBody>
       </p:sp>
-      <p:sp>
-        <p:nvSpPr>
-          <p:cNvPr id="8" name="TextBox 7"/>
-          <p:cNvSpPr txBox="1"/>
-          <p:nvPr/>
-        </p:nvSpPr>
-        <p:spPr>
-          <a:xfrm>
-            <a:off x="1234440" y="1874519"/>
-            <a:ext cx="10058400" cy="858740"/>
-          </a:xfrm>
-          <a:prstGeom prst="rect">
-            <a:avLst/>
-          </a:prstGeom>
-          <a:noFill/>
-        </p:spPr>
-        <p:txBody>
-          <a:bodyPr wrap="square" lIns="45720" rIns="45720" tIns="18288" bIns="18288" anchor="t">
-            <a:spAutoFit/>
-          </a:bodyPr>
-          <a:lstStyle/>
-          <a:p>
-            <a:pPr algn="l"/>
-            <a:r>
-              <a:rPr sz="2280" b="1" i="0">
-                <a:solidFill>
-                  <a:srgbClr val="1A1A1A"/>
-                </a:solidFill>
-                <a:latin typeface="Lexend"/>
-              </a:rPr>
-              <a:t>Angles P and Q are complementary, and angle P is 28°. What is angle Q?</a:t>
-            </a:r>
-          </a:p>
-        </p:txBody>
-      </p:sp>
       <p:pic>
         <p:nvPicPr>
-          <p:cNvPr id="9" name="Picture 8" descr="745c0b5bbb17bf72.png"/>
+          <p:cNvPr id="8" name="Picture 7" descr="ebbb07ffc24a4d45.png"/>
           <p:cNvPicPr>
             <a:picLocks noChangeAspect="1"/>
           </p:cNvPicPr>
@@ -9554,7 +9838,278 @@
         </p:blipFill>
         <p:spPr>
           <a:xfrm>
-            <a:off x="5222747" y="3055777"/>
+            <a:off x="1234440" y="1974151"/>
+            <a:ext cx="393763" cy="220408"/>
+          </a:xfrm>
+          <a:prstGeom prst="rect">
+            <a:avLst/>
+          </a:prstGeom>
+        </p:spPr>
+      </p:pic>
+      <p:sp>
+        <p:nvSpPr>
+          <p:cNvPr id="9" name="TextBox 8"/>
+          <p:cNvSpPr txBox="1"/>
+          <p:nvPr/>
+        </p:nvSpPr>
+        <p:spPr>
+          <a:xfrm>
+            <a:off x="1628203" y="1851660"/>
+            <a:ext cx="1004622" cy="457200"/>
+          </a:xfrm>
+          <a:prstGeom prst="rect">
+            <a:avLst/>
+          </a:prstGeom>
+          <a:noFill/>
+        </p:spPr>
+        <p:txBody>
+          <a:bodyPr wrap="none" lIns="45720" rIns="45720" tIns="18288" bIns="18288" anchor="ctr">
+            <a:noAutofit/>
+          </a:bodyPr>
+          <a:lstStyle/>
+          <a:p>
+            <a:pPr algn="l"/>
+            <a:r>
+              <a:rPr sz="2280" b="1" i="0">
+                <a:solidFill>
+                  <a:srgbClr val="1A1A1A"/>
+                </a:solidFill>
+                <a:latin typeface="Lexend"/>
+              </a:rPr>
+              <a:t> and </a:t>
+            </a:r>
+          </a:p>
+        </p:txBody>
+      </p:sp>
+      <p:pic>
+        <p:nvPicPr>
+          <p:cNvPr id="10" name="Picture 9" descr="159c08c6eed82f4e.png"/>
+          <p:cNvPicPr>
+            <a:picLocks noChangeAspect="1"/>
+          </p:cNvPicPr>
+          <p:nvPr/>
+        </p:nvPicPr>
+        <p:blipFill>
+          <a:blip r:embed="rId3"/>
+          <a:stretch>
+            <a:fillRect/>
+          </a:stretch>
+        </p:blipFill>
+        <p:spPr>
+          <a:xfrm>
+            <a:off x="2495666" y="1971675"/>
+            <a:ext cx="438340" cy="257556"/>
+          </a:xfrm>
+          <a:prstGeom prst="rect">
+            <a:avLst/>
+          </a:prstGeom>
+        </p:spPr>
+      </p:pic>
+      <p:sp>
+        <p:nvSpPr>
+          <p:cNvPr id="11" name="TextBox 10"/>
+          <p:cNvSpPr txBox="1"/>
+          <p:nvPr/>
+        </p:nvSpPr>
+        <p:spPr>
+          <a:xfrm>
+            <a:off x="2934006" y="1851660"/>
+            <a:ext cx="4258698" cy="457200"/>
+          </a:xfrm>
+          <a:prstGeom prst="rect">
+            <a:avLst/>
+          </a:prstGeom>
+          <a:noFill/>
+        </p:spPr>
+        <p:txBody>
+          <a:bodyPr wrap="none" lIns="45720" rIns="45720" tIns="18288" bIns="18288" anchor="ctr">
+            <a:noAutofit/>
+          </a:bodyPr>
+          <a:lstStyle/>
+          <a:p>
+            <a:pPr algn="l"/>
+            <a:r>
+              <a:rPr sz="2280" b="1" i="0">
+                <a:solidFill>
+                  <a:srgbClr val="1A1A1A"/>
+                </a:solidFill>
+                <a:latin typeface="Lexend"/>
+              </a:rPr>
+              <a:t> are complementary, and </a:t>
+            </a:r>
+          </a:p>
+        </p:txBody>
+      </p:sp>
+      <p:pic>
+        <p:nvPicPr>
+          <p:cNvPr id="12" name="Picture 11" descr="3a7f772a2815ff65.png"/>
+          <p:cNvPicPr>
+            <a:picLocks noChangeAspect="1"/>
+          </p:cNvPicPr>
+          <p:nvPr/>
+        </p:nvPicPr>
+        <p:blipFill>
+          <a:blip r:embed="rId4"/>
+          <a:stretch>
+            <a:fillRect/>
+          </a:stretch>
+        </p:blipFill>
+        <p:spPr>
+          <a:xfrm>
+            <a:off x="7055544" y="1971675"/>
+            <a:ext cx="1463611" cy="225361"/>
+          </a:xfrm>
+          <a:prstGeom prst="rect">
+            <a:avLst/>
+          </a:prstGeom>
+        </p:spPr>
+      </p:pic>
+      <p:sp>
+        <p:nvSpPr>
+          <p:cNvPr id="13" name="TextBox 12"/>
+          <p:cNvSpPr txBox="1"/>
+          <p:nvPr/>
+        </p:nvSpPr>
+        <p:spPr>
+          <a:xfrm>
+            <a:off x="8519156" y="1851660"/>
+            <a:ext cx="289193" cy="457200"/>
+          </a:xfrm>
+          <a:prstGeom prst="rect">
+            <a:avLst/>
+          </a:prstGeom>
+          <a:noFill/>
+        </p:spPr>
+        <p:txBody>
+          <a:bodyPr wrap="none" lIns="45720" rIns="45720" tIns="18288" bIns="18288" anchor="ctr">
+            <a:noAutofit/>
+          </a:bodyPr>
+          <a:lstStyle/>
+          <a:p>
+            <a:pPr algn="l"/>
+            <a:r>
+              <a:rPr sz="2280" b="1" i="0">
+                <a:solidFill>
+                  <a:srgbClr val="1A1A1A"/>
+                </a:solidFill>
+                <a:latin typeface="Lexend"/>
+              </a:rPr>
+              <a:t>.</a:t>
+            </a:r>
+          </a:p>
+        </p:txBody>
+      </p:sp>
+      <p:sp>
+        <p:nvSpPr>
+          <p:cNvPr id="14" name="TextBox 13"/>
+          <p:cNvSpPr txBox="1"/>
+          <p:nvPr/>
+        </p:nvSpPr>
+        <p:spPr>
+          <a:xfrm>
+            <a:off x="1234440" y="2464308"/>
+            <a:ext cx="1480659" cy="457200"/>
+          </a:xfrm>
+          <a:prstGeom prst="rect">
+            <a:avLst/>
+          </a:prstGeom>
+          <a:noFill/>
+        </p:spPr>
+        <p:txBody>
+          <a:bodyPr wrap="none" lIns="45720" rIns="45720" tIns="18288" bIns="18288" anchor="ctr">
+            <a:noAutofit/>
+          </a:bodyPr>
+          <a:lstStyle/>
+          <a:p>
+            <a:pPr algn="l"/>
+            <a:r>
+              <a:rPr sz="2280" b="1" i="0">
+                <a:solidFill>
+                  <a:srgbClr val="1A1A1A"/>
+                </a:solidFill>
+                <a:latin typeface="Lexend"/>
+              </a:rPr>
+              <a:t>What is </a:t>
+            </a:r>
+          </a:p>
+        </p:txBody>
+      </p:sp>
+      <p:pic>
+        <p:nvPicPr>
+          <p:cNvPr id="15" name="Picture 14" descr="52c288f6d52551fe.png"/>
+          <p:cNvPicPr>
+            <a:picLocks noChangeAspect="1"/>
+          </p:cNvPicPr>
+          <p:nvPr/>
+        </p:nvPicPr>
+        <p:blipFill>
+          <a:blip r:embed="rId5"/>
+          <a:stretch>
+            <a:fillRect/>
+          </a:stretch>
+        </p:blipFill>
+        <p:spPr>
+          <a:xfrm>
+            <a:off x="2577939" y="2584323"/>
+            <a:ext cx="710755" cy="257556"/>
+          </a:xfrm>
+          <a:prstGeom prst="rect">
+            <a:avLst/>
+          </a:prstGeom>
+        </p:spPr>
+      </p:pic>
+      <p:sp>
+        <p:nvSpPr>
+          <p:cNvPr id="16" name="TextBox 15"/>
+          <p:cNvSpPr txBox="1"/>
+          <p:nvPr/>
+        </p:nvSpPr>
+        <p:spPr>
+          <a:xfrm>
+            <a:off x="3288694" y="2464308"/>
+            <a:ext cx="374819" cy="457200"/>
+          </a:xfrm>
+          <a:prstGeom prst="rect">
+            <a:avLst/>
+          </a:prstGeom>
+          <a:noFill/>
+        </p:spPr>
+        <p:txBody>
+          <a:bodyPr wrap="none" lIns="45720" rIns="45720" tIns="18288" bIns="18288" anchor="ctr">
+            <a:noAutofit/>
+          </a:bodyPr>
+          <a:lstStyle/>
+          <a:p>
+            <a:pPr algn="l"/>
+            <a:r>
+              <a:rPr sz="2280" b="1" i="0">
+                <a:solidFill>
+                  <a:srgbClr val="1A1A1A"/>
+                </a:solidFill>
+                <a:latin typeface="Lexend"/>
+              </a:rPr>
+              <a:t>?</a:t>
+            </a:r>
+          </a:p>
+        </p:txBody>
+      </p:sp>
+      <p:pic>
+        <p:nvPicPr>
+          <p:cNvPr id="17" name="Picture 16" descr="745c0b5bbb17bf72.png"/>
+          <p:cNvPicPr>
+            <a:picLocks noChangeAspect="1"/>
+          </p:cNvPicPr>
+          <p:nvPr/>
+        </p:nvPicPr>
+        <p:blipFill>
+          <a:blip r:embed="rId6"/>
+          <a:stretch>
+            <a:fillRect/>
+          </a:stretch>
+        </p:blipFill>
+        <p:spPr>
+          <a:xfrm>
+            <a:off x="5222747" y="3312604"/>
             <a:ext cx="1825752" cy="256032"/>
           </a:xfrm>
           <a:prstGeom prst="rect">
@@ -9564,7 +10119,7 @@
       </p:pic>
       <p:sp>
         <p:nvSpPr>
-          <p:cNvPr id="10" name="TextBox 9"/>
+          <p:cNvPr id="18" name="TextBox 17"/>
           <p:cNvSpPr txBox="1"/>
           <p:nvPr/>
         </p:nvSpPr>
@@ -11561,7 +12116,7 @@
         </p:blipFill>
         <p:spPr>
           <a:xfrm>
-            <a:off x="1294256" y="3071986"/>
+            <a:off x="1315165" y="3071986"/>
             <a:ext cx="2726495" cy="2213245"/>
           </a:xfrm>
           <a:prstGeom prst="rect">
@@ -11577,8 +12132,8 @@
         </p:nvSpPr>
         <p:spPr>
           <a:xfrm>
-            <a:off x="4752272" y="3698549"/>
-            <a:ext cx="4135605" cy="457200"/>
+            <a:off x="4773181" y="3447089"/>
+            <a:ext cx="4653805" cy="457200"/>
           </a:xfrm>
           <a:prstGeom prst="rect">
             <a:avLst/>
@@ -11599,14 +12154,14 @@
                 </a:solidFill>
                 <a:latin typeface="Lexend"/>
               </a:rPr>
-              <a:t>equal:  6x − 20 = 2x + 28,   </a:t>
+              <a:t>equal:  6x − 20 = 2x + 28,   so  </a:t>
             </a:r>
           </a:p>
         </p:txBody>
       </p:sp>
       <p:pic>
         <p:nvPicPr>
-          <p:cNvPr id="16" name="Picture 15" descr="d0d97e910887ae98.png"/>
+          <p:cNvPr id="16" name="Picture 15" descr="3cb91e7565858adc.png"/>
           <p:cNvPicPr>
             <a:picLocks noChangeAspect="1"/>
           </p:cNvPicPr>
@@ -11620,52 +12175,17 @@
         </p:blipFill>
         <p:spPr>
           <a:xfrm>
-            <a:off x="8750717" y="3838471"/>
-            <a:ext cx="956786" cy="207692"/>
+            <a:off x="9289826" y="3584677"/>
+            <a:ext cx="1556527" cy="212359"/>
           </a:xfrm>
           <a:prstGeom prst="rect">
             <a:avLst/>
           </a:prstGeom>
         </p:spPr>
       </p:pic>
-      <p:sp>
-        <p:nvSpPr>
-          <p:cNvPr id="17" name="TextBox 16"/>
-          <p:cNvSpPr txBox="1"/>
-          <p:nvPr/>
-        </p:nvSpPr>
-        <p:spPr>
-          <a:xfrm>
-            <a:off x="9707503" y="3698549"/>
-            <a:ext cx="557160" cy="457200"/>
-          </a:xfrm>
-          <a:prstGeom prst="rect">
-            <a:avLst/>
-          </a:prstGeom>
-          <a:noFill/>
-        </p:spPr>
-        <p:txBody>
-          <a:bodyPr wrap="none" lIns="45720" rIns="45720" tIns="18288" bIns="18288" anchor="ctr">
-            <a:noAutofit/>
-          </a:bodyPr>
-          <a:lstStyle/>
-          <a:p>
-            <a:pPr algn="l"/>
-            <a:r>
-              <a:rPr sz="2330" b="0" i="0">
-                <a:solidFill>
-                  <a:srgbClr val="1A1A1A"/>
-                </a:solidFill>
-                <a:latin typeface="Lexend"/>
-              </a:rPr>
-              <a:t>,   </a:t>
-            </a:r>
-          </a:p>
-        </p:txBody>
-      </p:sp>
       <p:pic>
         <p:nvPicPr>
-          <p:cNvPr id="18" name="Picture 17" descr="449ed3ef3863c3a5.png"/>
+          <p:cNvPr id="17" name="Picture 16" descr="c0a42a78d97a1eab.png"/>
           <p:cNvPicPr>
             <a:picLocks noChangeAspect="1"/>
           </p:cNvPicPr>
@@ -11679,17 +12199,52 @@
         </p:blipFill>
         <p:spPr>
           <a:xfrm>
-            <a:off x="10127504" y="3833804"/>
-            <a:ext cx="739759" cy="210026"/>
+            <a:off x="4828045" y="4091074"/>
+            <a:ext cx="957072" cy="207264"/>
           </a:xfrm>
           <a:prstGeom prst="rect">
             <a:avLst/>
           </a:prstGeom>
         </p:spPr>
       </p:pic>
+      <p:sp>
+        <p:nvSpPr>
+          <p:cNvPr id="18" name="TextBox 17"/>
+          <p:cNvSpPr txBox="1"/>
+          <p:nvPr/>
+        </p:nvSpPr>
+        <p:spPr>
+          <a:xfrm>
+            <a:off x="5785117" y="3950009"/>
+            <a:ext cx="557160" cy="457200"/>
+          </a:xfrm>
+          <a:prstGeom prst="rect">
+            <a:avLst/>
+          </a:prstGeom>
+          <a:noFill/>
+        </p:spPr>
+        <p:txBody>
+          <a:bodyPr wrap="none" lIns="45720" rIns="45720" tIns="18288" bIns="18288" anchor="ctr">
+            <a:noAutofit/>
+          </a:bodyPr>
+          <a:lstStyle/>
+          <a:p>
+            <a:pPr algn="l"/>
+            <a:r>
+              <a:rPr sz="2330" b="0" i="0">
+                <a:solidFill>
+                  <a:srgbClr val="1A1A1A"/>
+                </a:solidFill>
+                <a:latin typeface="Lexend"/>
+              </a:rPr>
+              <a:t>,   </a:t>
+            </a:r>
+          </a:p>
+        </p:txBody>
+      </p:sp>
       <p:pic>
         <p:nvPicPr>
-          <p:cNvPr id="19" name="Picture 18" descr="b9cd8d999bb09534.png"/>
+          <p:cNvPr id="19" name="Picture 18" descr="c9ab79e3ddc85027.png"/>
           <p:cNvPicPr>
             <a:picLocks noChangeAspect="1"/>
           </p:cNvPicPr>
@@ -11703,7 +12258,31 @@
         </p:blipFill>
         <p:spPr>
           <a:xfrm>
-            <a:off x="4807136" y="4339486"/>
+            <a:off x="6205118" y="4084978"/>
+            <a:ext cx="743712" cy="210312"/>
+          </a:xfrm>
+          <a:prstGeom prst="rect">
+            <a:avLst/>
+          </a:prstGeom>
+        </p:spPr>
+      </p:pic>
+      <p:pic>
+        <p:nvPicPr>
+          <p:cNvPr id="20" name="Picture 19" descr="b9cd8d999bb09534.png"/>
+          <p:cNvPicPr>
+            <a:picLocks noChangeAspect="1"/>
+          </p:cNvPicPr>
+          <p:nvPr/>
+        </p:nvPicPr>
+        <p:blipFill>
+          <a:blip r:embed="rId8"/>
+          <a:stretch>
+            <a:fillRect/>
+          </a:stretch>
+        </p:blipFill>
+        <p:spPr>
+          <a:xfrm>
+            <a:off x="4828045" y="4590946"/>
             <a:ext cx="1898904" cy="265176"/>
           </a:xfrm>
           <a:prstGeom prst="rect">
@@ -11713,7 +12292,7 @@
       </p:pic>
       <p:sp>
         <p:nvSpPr>
-          <p:cNvPr id="20" name="TextBox 19"/>
+          <p:cNvPr id="21" name="TextBox 20"/>
           <p:cNvSpPr txBox="1"/>
           <p:nvPr/>
         </p:nvSpPr>
@@ -13562,7 +14141,7 @@
       </p:sp>
       <p:pic>
         <p:nvPicPr>
-          <p:cNvPr id="10" name="Picture 9" descr="ga3134db9c0b06966.png"/>
+          <p:cNvPr id="10" name="Picture 9" descr="g9e90bd77297c2b19.png"/>
           <p:cNvPicPr>
             <a:picLocks noChangeAspect="1"/>
           </p:cNvPicPr>
@@ -13919,7 +14498,7 @@
       </p:sp>
       <p:pic>
         <p:nvPicPr>
-          <p:cNvPr id="10" name="Picture 9" descr="ga3134db9c0b06966.png"/>
+          <p:cNvPr id="10" name="Picture 9" descr="g9e90bd77297c2b19.png"/>
           <p:cNvPicPr>
             <a:picLocks noChangeAspect="1"/>
           </p:cNvPicPr>
@@ -15703,16 +16282,40 @@
           </a:p>
         </p:txBody>
       </p:sp>
-      <p:sp>
-        <p:nvSpPr>
-          <p:cNvPr id="28" name="TextBox 27"/>
-          <p:cNvSpPr txBox="1"/>
-          <p:nvPr/>
-        </p:nvSpPr>
-        <p:spPr>
-          <a:xfrm>
-            <a:off x="1554480" y="4555898"/>
-            <a:ext cx="9885364" cy="417443"/>
+      <p:pic>
+        <p:nvPicPr>
+          <p:cNvPr id="28" name="Picture 27" descr="b2dd3170aa6e6119.png"/>
+          <p:cNvPicPr>
+            <a:picLocks noChangeAspect="1"/>
+          </p:cNvPicPr>
+          <p:nvPr/>
+        </p:nvPicPr>
+        <p:blipFill>
+          <a:blip r:embed="rId6"/>
+          <a:stretch>
+            <a:fillRect/>
+          </a:stretch>
+        </p:blipFill>
+        <p:spPr>
+          <a:xfrm>
+            <a:off x="1627632" y="4646344"/>
+            <a:ext cx="782010" cy="236551"/>
+          </a:xfrm>
+          <a:prstGeom prst="rect">
+            <a:avLst/>
+          </a:prstGeom>
+        </p:spPr>
+      </p:pic>
+      <p:sp>
+        <p:nvSpPr>
+          <p:cNvPr id="29" name="TextBox 28"/>
+          <p:cNvSpPr txBox="1"/>
+          <p:nvPr/>
+        </p:nvSpPr>
+        <p:spPr>
+          <a:xfrm>
+            <a:off x="2409642" y="4555898"/>
+            <a:ext cx="860747" cy="417443"/>
           </a:xfrm>
           <a:prstGeom prst="rect">
             <a:avLst/>
@@ -15733,21 +16336,45 @@
                 </a:solidFill>
                 <a:latin typeface="Lexend"/>
               </a:rPr>
-              <a:t>Angles PQR and RQS share the side QR and together make a straight line. </a:t>
-            </a:r>
-          </a:p>
-        </p:txBody>
-      </p:sp>
-      <p:sp>
-        <p:nvSpPr>
-          <p:cNvPr id="29" name="TextBox 28"/>
-          <p:cNvSpPr txBox="1"/>
-          <p:nvPr/>
-        </p:nvSpPr>
-        <p:spPr>
-          <a:xfrm>
-            <a:off x="1554480" y="4959029"/>
-            <a:ext cx="7072456" cy="417443"/>
+              <a:t> and </a:t>
+            </a:r>
+          </a:p>
+        </p:txBody>
+      </p:sp>
+      <p:pic>
+        <p:nvPicPr>
+          <p:cNvPr id="30" name="Picture 29" descr="a52c8ccabb4b16e1.png"/>
+          <p:cNvPicPr>
+            <a:picLocks noChangeAspect="1"/>
+          </p:cNvPicPr>
+          <p:nvPr/>
+        </p:nvPicPr>
+        <p:blipFill>
+          <a:blip r:embed="rId7"/>
+          <a:stretch>
+            <a:fillRect/>
+          </a:stretch>
+        </p:blipFill>
+        <p:spPr>
+          <a:xfrm>
+            <a:off x="3133230" y="4646344"/>
+            <a:ext cx="776444" cy="236551"/>
+          </a:xfrm>
+          <a:prstGeom prst="rect">
+            <a:avLst/>
+          </a:prstGeom>
+        </p:spPr>
+      </p:pic>
+      <p:sp>
+        <p:nvSpPr>
+          <p:cNvPr id="31" name="TextBox 30"/>
+          <p:cNvSpPr txBox="1"/>
+          <p:nvPr/>
+        </p:nvSpPr>
+        <p:spPr>
+          <a:xfrm>
+            <a:off x="3909675" y="4555898"/>
+            <a:ext cx="7168922" cy="417443"/>
           </a:xfrm>
           <a:prstGeom prst="rect">
             <a:avLst/>
@@ -15768,7 +16395,160 @@
                 </a:solidFill>
                 <a:latin typeface="Lexend"/>
               </a:rPr>
-              <a:t>Angle PQR is 65°. Name the pair and find angle RQS.</a:t>
+              <a:t> share the side QR and together make a straight line, </a:t>
+            </a:r>
+          </a:p>
+        </p:txBody>
+      </p:sp>
+      <p:sp>
+        <p:nvSpPr>
+          <p:cNvPr id="32" name="TextBox 31"/>
+          <p:cNvSpPr txBox="1"/>
+          <p:nvPr/>
+        </p:nvSpPr>
+        <p:spPr>
+          <a:xfrm>
+            <a:off x="1554480" y="4959029"/>
+            <a:ext cx="785562" cy="417443"/>
+          </a:xfrm>
+          <a:prstGeom prst="rect">
+            <a:avLst/>
+          </a:prstGeom>
+          <a:noFill/>
+        </p:spPr>
+        <p:txBody>
+          <a:bodyPr wrap="none" lIns="45720" rIns="45720" tIns="18288" bIns="18288" anchor="ctr">
+            <a:noAutofit/>
+          </a:bodyPr>
+          <a:lstStyle/>
+          <a:p>
+            <a:pPr algn="l"/>
+            <a:r>
+              <a:rPr sz="1989" b="0" i="0">
+                <a:solidFill>
+                  <a:srgbClr val="1A1A1A"/>
+                </a:solidFill>
+                <a:latin typeface="Lexend"/>
+              </a:rPr>
+              <a:t>and </a:t>
+            </a:r>
+          </a:p>
+        </p:txBody>
+      </p:sp>
+      <p:pic>
+        <p:nvPicPr>
+          <p:cNvPr id="33" name="Picture 32" descr="2c401f527e9ce7a4.png"/>
+          <p:cNvPicPr>
+            <a:picLocks noChangeAspect="1"/>
+          </p:cNvPicPr>
+          <p:nvPr/>
+        </p:nvPicPr>
+        <p:blipFill>
+          <a:blip r:embed="rId8"/>
+          <a:stretch>
+            <a:fillRect/>
+          </a:stretch>
+        </p:blipFill>
+        <p:spPr>
+          <a:xfrm>
+            <a:off x="2202882" y="5049475"/>
+            <a:ext cx="1756045" cy="236551"/>
+          </a:xfrm>
+          <a:prstGeom prst="rect">
+            <a:avLst/>
+          </a:prstGeom>
+        </p:spPr>
+      </p:pic>
+      <p:sp>
+        <p:nvSpPr>
+          <p:cNvPr id="34" name="TextBox 33"/>
+          <p:cNvSpPr txBox="1"/>
+          <p:nvPr/>
+        </p:nvSpPr>
+        <p:spPr>
+          <a:xfrm>
+            <a:off x="3958928" y="4959029"/>
+            <a:ext cx="3463338" cy="417443"/>
+          </a:xfrm>
+          <a:prstGeom prst="rect">
+            <a:avLst/>
+          </a:prstGeom>
+          <a:noFill/>
+        </p:spPr>
+        <p:txBody>
+          <a:bodyPr wrap="none" lIns="45720" rIns="45720" tIns="18288" bIns="18288" anchor="ctr">
+            <a:noAutofit/>
+          </a:bodyPr>
+          <a:lstStyle/>
+          <a:p>
+            <a:pPr algn="l"/>
+            <a:r>
+              <a:rPr sz="1989" b="0" i="0">
+                <a:solidFill>
+                  <a:srgbClr val="1A1A1A"/>
+                </a:solidFill>
+                <a:latin typeface="Lexend"/>
+              </a:rPr>
+              <a:t>. Name the pair and find </a:t>
+            </a:r>
+          </a:p>
+        </p:txBody>
+      </p:sp>
+      <p:pic>
+        <p:nvPicPr>
+          <p:cNvPr id="35" name="Picture 34" descr="4211ba0231777faf.png"/>
+          <p:cNvPicPr>
+            <a:picLocks noChangeAspect="1"/>
+          </p:cNvPicPr>
+          <p:nvPr/>
+        </p:nvPicPr>
+        <p:blipFill>
+          <a:blip r:embed="rId9"/>
+          <a:stretch>
+            <a:fillRect/>
+          </a:stretch>
+        </p:blipFill>
+        <p:spPr>
+          <a:xfrm>
+            <a:off x="7285106" y="5049475"/>
+            <a:ext cx="1026910" cy="236551"/>
+          </a:xfrm>
+          <a:prstGeom prst="rect">
+            <a:avLst/>
+          </a:prstGeom>
+        </p:spPr>
+      </p:pic>
+      <p:sp>
+        <p:nvSpPr>
+          <p:cNvPr id="36" name="TextBox 35"/>
+          <p:cNvSpPr txBox="1"/>
+          <p:nvPr/>
+        </p:nvSpPr>
+        <p:spPr>
+          <a:xfrm>
+            <a:off x="8312017" y="4959029"/>
+            <a:ext cx="271558" cy="417443"/>
+          </a:xfrm>
+          <a:prstGeom prst="rect">
+            <a:avLst/>
+          </a:prstGeom>
+          <a:noFill/>
+        </p:spPr>
+        <p:txBody>
+          <a:bodyPr wrap="none" lIns="45720" rIns="45720" tIns="18288" bIns="18288" anchor="ctr">
+            <a:noAutofit/>
+          </a:bodyPr>
+          <a:lstStyle/>
+          <a:p>
+            <a:pPr algn="l"/>
+            <a:r>
+              <a:rPr sz="1989" b="0" i="0">
+                <a:solidFill>
+                  <a:srgbClr val="1A1A1A"/>
+                </a:solidFill>
+                <a:latin typeface="Lexend"/>
+              </a:rPr>
+              <a:t>.</a:t>
             </a:r>
           </a:p>
         </p:txBody>
@@ -17224,17 +18004,17 @@
         </p:nvSpPr>
         <p:spPr>
           <a:xfrm>
-            <a:off x="987552" y="5680605"/>
-            <a:ext cx="10131551" cy="475488"/>
-          </a:xfrm>
-          <a:prstGeom prst="rect">
-            <a:avLst/>
-          </a:prstGeom>
-          <a:noFill/>
-        </p:spPr>
-        <p:txBody>
-          <a:bodyPr wrap="square" lIns="45720" rIns="45720" tIns="18288" bIns="18288" anchor="t">
-            <a:spAutoFit/>
+            <a:off x="987552" y="5639457"/>
+            <a:ext cx="4645912" cy="457200"/>
+          </a:xfrm>
+          <a:prstGeom prst="rect">
+            <a:avLst/>
+          </a:prstGeom>
+          <a:noFill/>
+        </p:spPr>
+        <p:txBody>
+          <a:bodyPr wrap="none" lIns="45720" rIns="45720" tIns="18288" bIns="18288" anchor="ctr">
+            <a:noAutofit/>
           </a:bodyPr>
           <a:lstStyle/>
           <a:p>
@@ -17246,7 +18026,66 @@
                 </a:solidFill>
                 <a:latin typeface="Lexend"/>
               </a:rPr>
-              <a:t>Vertical: across the crossing, and equal — angle 1 = angle 3.</a:t>
+              <a:t>Vertical: across, and equal — </a:t>
+            </a:r>
+          </a:p>
+        </p:txBody>
+      </p:sp>
+      <p:pic>
+        <p:nvPicPr>
+          <p:cNvPr id="13" name="Picture 12" descr="383818eb4f254330.png"/>
+          <p:cNvPicPr>
+            <a:picLocks noChangeAspect="1"/>
+          </p:cNvPicPr>
+          <p:nvPr/>
+        </p:nvPicPr>
+        <p:blipFill>
+          <a:blip r:embed="rId3"/>
+          <a:stretch>
+            <a:fillRect/>
+          </a:stretch>
+        </p:blipFill>
+        <p:spPr>
+          <a:xfrm>
+            <a:off x="5496304" y="5766370"/>
+            <a:ext cx="1526039" cy="215971"/>
+          </a:xfrm>
+          <a:prstGeom prst="rect">
+            <a:avLst/>
+          </a:prstGeom>
+        </p:spPr>
+      </p:pic>
+      <p:sp>
+        <p:nvSpPr>
+          <p:cNvPr id="14" name="TextBox 13"/>
+          <p:cNvSpPr txBox="1"/>
+          <p:nvPr/>
+        </p:nvSpPr>
+        <p:spPr>
+          <a:xfrm>
+            <a:off x="7022344" y="5639457"/>
+            <a:ext cx="2795967" cy="457200"/>
+          </a:xfrm>
+          <a:prstGeom prst="rect">
+            <a:avLst/>
+          </a:prstGeom>
+          <a:noFill/>
+        </p:spPr>
+        <p:txBody>
+          <a:bodyPr wrap="none" lIns="45720" rIns="45720" tIns="18288" bIns="18288" anchor="ctr">
+            <a:noAutofit/>
+          </a:bodyPr>
+          <a:lstStyle/>
+          <a:p>
+            <a:pPr algn="l"/>
+            <a:r>
+              <a:rPr sz="2180" b="1" i="0">
+                <a:solidFill>
+                  <a:srgbClr val="1A1A1A"/>
+                </a:solidFill>
+                <a:latin typeface="Lexend"/>
+              </a:rPr>
+              <a:t> (m for measure).</a:t>
             </a:r>
           </a:p>
         </p:txBody>
@@ -18549,7 +19388,7 @@
       </p:sp>
       <p:pic>
         <p:nvPicPr>
-          <p:cNvPr id="13" name="Picture 12" descr="ga8a34ae1a6f6f3b9.png"/>
+          <p:cNvPr id="13" name="Picture 12" descr="gebe47a9162b99089.png"/>
           <p:cNvPicPr>
             <a:picLocks noChangeAspect="1"/>
           </p:cNvPicPr>

--- a/a7/build/out/u6/A7 6.T1 Angle Pairs Supplementary, Complementary, Vertical, Adjacent - Slides.pptx
+++ b/a7/build/out/u6/A7 6.T1 Angle Pairs Supplementary, Complementary, Vertical, Adjacent - Slides.pptx
@@ -17035,7 +17035,7 @@
         <p:spPr>
           <a:xfrm>
             <a:off x="1325880" y="4507992"/>
-            <a:ext cx="9692640" cy="329184"/>
+            <a:ext cx="9692640" cy="658368"/>
           </a:xfrm>
           <a:prstGeom prst="rect">
             <a:avLst/>
@@ -17069,8 +17069,8 @@
         </p:nvSpPr>
         <p:spPr>
           <a:xfrm>
-            <a:off x="1325880" y="4837176"/>
-            <a:ext cx="9692640" cy="329184"/>
+            <a:off x="1325880" y="5166359"/>
+            <a:ext cx="9692640" cy="658368"/>
           </a:xfrm>
           <a:prstGeom prst="rect">
             <a:avLst/>
@@ -17104,7 +17104,7 @@
         </p:nvSpPr>
         <p:spPr>
           <a:xfrm>
-            <a:off x="1325880" y="5166360"/>
+            <a:off x="1325880" y="5824727"/>
             <a:ext cx="9692640" cy="329184"/>
           </a:xfrm>
           <a:prstGeom prst="rect">

--- a/a7/build/out/u6/A7 6.T1 Angle Pairs Supplementary, Complementary, Vertical, Adjacent - Slides.pptx
+++ b/a7/build/out/u6/A7 6.T1 Angle Pairs Supplementary, Complementary, Vertical, Adjacent - Slides.pptx
@@ -16986,7 +16986,7 @@
                 </a:solidFill>
                 <a:latin typeface="Lexend"/>
               </a:rPr>
-              <a:t>Every skill listed is required, to a SmartScore of 67. Due at the start of the next class.</a:t>
+              <a:t>Every skill listed is required, to a SmartScore of 67. Due by the Unit 11 test.</a:t>
             </a:r>
           </a:p>
         </p:txBody>

--- a/a7/build/out/u6/A7 6.T1 Angle Pairs Supplementary, Complementary, Vertical, Adjacent - Slides.pptx
+++ b/a7/build/out/u6/A7 6.T1 Angle Pairs Supplementary, Complementary, Vertical, Adjacent - Slides.pptx
@@ -8723,7 +8723,7 @@
         </p:blipFill>
         <p:spPr>
           <a:xfrm>
-            <a:off x="1911319" y="2998436"/>
+            <a:off x="1986379" y="2998436"/>
             <a:ext cx="3004268" cy="2286795"/>
           </a:xfrm>
           <a:prstGeom prst="rect">
@@ -8731,9 +8731,44 @@
           </a:prstGeom>
         </p:spPr>
       </p:pic>
+      <p:sp>
+        <p:nvSpPr>
+          <p:cNvPr id="11" name="TextBox 10"/>
+          <p:cNvSpPr txBox="1"/>
+          <p:nvPr/>
+        </p:nvSpPr>
+        <p:spPr>
+          <a:xfrm>
+            <a:off x="5722167" y="3661774"/>
+            <a:ext cx="1600205" cy="457200"/>
+          </a:xfrm>
+          <a:prstGeom prst="rect">
+            <a:avLst/>
+          </a:prstGeom>
+          <a:noFill/>
+        </p:spPr>
+        <p:txBody>
+          <a:bodyPr wrap="none" lIns="45720" rIns="45720" tIns="18288" bIns="18288" anchor="ctr">
+            <a:noAutofit/>
+          </a:bodyPr>
+          <a:lstStyle/>
+          <a:p>
+            <a:pPr algn="l"/>
+            <a:r>
+              <a:rPr sz="2330" b="0" i="0">
+                <a:solidFill>
+                  <a:srgbClr val="1A1A1A"/>
+                </a:solidFill>
+                <a:latin typeface="Lexend"/>
+              </a:rPr>
+              <a:t>vertical:  </a:t>
+            </a:r>
+          </a:p>
+        </p:txBody>
+      </p:sp>
       <p:pic>
         <p:nvPicPr>
-          <p:cNvPr id="11" name="Picture 10" descr="4bae18db7a4d732e.png"/>
+          <p:cNvPr id="12" name="Picture 11" descr="4bae18db7a4d732e.png"/>
           <p:cNvPicPr>
             <a:picLocks noChangeAspect="1"/>
           </p:cNvPicPr>
@@ -8747,7 +8782,7 @@
         </p:blipFill>
         <p:spPr>
           <a:xfrm>
-            <a:off x="5701971" y="3801696"/>
+            <a:off x="7185212" y="3801696"/>
             <a:ext cx="788765" cy="210026"/>
           </a:xfrm>
           <a:prstGeom prst="rect">
@@ -8757,14 +8792,14 @@
       </p:pic>
       <p:sp>
         <p:nvSpPr>
-          <p:cNvPr id="12" name="TextBox 11"/>
-          <p:cNvSpPr txBox="1"/>
-          <p:nvPr/>
-        </p:nvSpPr>
-        <p:spPr>
-          <a:xfrm>
-            <a:off x="6490736" y="3661774"/>
-            <a:ext cx="1758168" cy="457200"/>
+          <p:cNvPr id="13" name="TextBox 12"/>
+          <p:cNvSpPr txBox="1"/>
+          <p:nvPr/>
+        </p:nvSpPr>
+        <p:spPr>
+          <a:xfrm>
+            <a:off x="5722167" y="4164694"/>
+            <a:ext cx="2300847" cy="457200"/>
           </a:xfrm>
           <a:prstGeom prst="rect">
             <a:avLst/>
@@ -8785,14 +8820,14 @@
                 </a:solidFill>
                 <a:latin typeface="Lexend"/>
               </a:rPr>
-              <a:t>  (vertical)</a:t>
+              <a:t>a linear pair:  </a:t>
             </a:r>
           </a:p>
         </p:txBody>
       </p:sp>
       <p:pic>
         <p:nvPicPr>
-          <p:cNvPr id="13" name="Picture 12" descr="d938da6dc5492866.png"/>
+          <p:cNvPr id="14" name="Picture 13" descr="d938da6dc5492866.png"/>
           <p:cNvPicPr>
             <a:picLocks noChangeAspect="1"/>
           </p:cNvPicPr>
@@ -8806,7 +8841,7 @@
         </p:blipFill>
         <p:spPr>
           <a:xfrm>
-            <a:off x="5701971" y="4292948"/>
+            <a:off x="7885854" y="4292948"/>
             <a:ext cx="2291619" cy="221694"/>
           </a:xfrm>
           <a:prstGeom prst="rect">
@@ -8814,41 +8849,6 @@
           </a:prstGeom>
         </p:spPr>
       </p:pic>
-      <p:sp>
-        <p:nvSpPr>
-          <p:cNvPr id="14" name="TextBox 13"/>
-          <p:cNvSpPr txBox="1"/>
-          <p:nvPr/>
-        </p:nvSpPr>
-        <p:spPr>
-          <a:xfrm>
-            <a:off x="7993591" y="4164694"/>
-            <a:ext cx="2450967" cy="457200"/>
-          </a:xfrm>
-          <a:prstGeom prst="rect">
-            <a:avLst/>
-          </a:prstGeom>
-          <a:noFill/>
-        </p:spPr>
-        <p:txBody>
-          <a:bodyPr wrap="none" lIns="45720" rIns="45720" tIns="18288" bIns="18288" anchor="ctr">
-            <a:noAutofit/>
-          </a:bodyPr>
-          <a:lstStyle/>
-          <a:p>
-            <a:pPr algn="l"/>
-            <a:r>
-              <a:rPr sz="2330" b="0" i="0">
-                <a:solidFill>
-                  <a:srgbClr val="1A1A1A"/>
-                </a:solidFill>
-                <a:latin typeface="Lexend"/>
-              </a:rPr>
-              <a:t>  (a linear pair)</a:t>
-            </a:r>
-          </a:p>
-        </p:txBody>
-      </p:sp>
       <p:sp>
         <p:nvSpPr>
           <p:cNvPr id="15" name="TextBox 14"/>
@@ -11627,7 +11627,7 @@
       </p:sp>
       <p:pic>
         <p:nvPicPr>
-          <p:cNvPr id="14" name="Picture 13" descr="g47e86856adf2b962.png"/>
+          <p:cNvPr id="14" name="Picture 13" descr="g67f53515655a9574.png"/>
           <p:cNvPicPr>
             <a:picLocks noChangeAspect="1"/>
           </p:cNvPicPr>
@@ -11641,8 +11641,8 @@
         </p:blipFill>
         <p:spPr>
           <a:xfrm>
-            <a:off x="4717512" y="3071986"/>
-            <a:ext cx="2726495" cy="2213245"/>
+            <a:off x="4576706" y="3071986"/>
+            <a:ext cx="3008107" cy="2441845"/>
           </a:xfrm>
           <a:prstGeom prst="rect">
             <a:avLst/>
@@ -11657,7 +11657,7 @@
         </p:nvSpPr>
         <p:spPr>
           <a:xfrm>
-            <a:off x="777240" y="5568696"/>
+            <a:off x="777240" y="5687568"/>
             <a:ext cx="10607040" cy="457200"/>
           </a:xfrm>
           <a:prstGeom prst="rect">
@@ -12102,7 +12102,7 @@
       </p:sp>
       <p:pic>
         <p:nvPicPr>
-          <p:cNvPr id="14" name="Picture 13" descr="g47e86856adf2b962.png"/>
+          <p:cNvPr id="14" name="Picture 13" descr="g89971f5fd862419d.png"/>
           <p:cNvPicPr>
             <a:picLocks noChangeAspect="1"/>
           </p:cNvPicPr>
@@ -12577,6 +12577,41 @@
           <a:p>
             <a:pPr algn="l"/>
             <a:r>
+              <a:rPr sz="2280" b="0" i="0">
+                <a:solidFill>
+                  <a:srgbClr val="1A1A1A"/>
+                </a:solidFill>
+                <a:latin typeface="Lexend"/>
+              </a:rPr>
+              <a:t>In the figure, lines AD and BE cross at O, and ray OC is drawn.</a:t>
+            </a:r>
+          </a:p>
+        </p:txBody>
+      </p:sp>
+      <p:sp>
+        <p:nvSpPr>
+          <p:cNvPr id="9" name="TextBox 8"/>
+          <p:cNvSpPr txBox="1"/>
+          <p:nvPr/>
+        </p:nvSpPr>
+        <p:spPr>
+          <a:xfrm>
+            <a:off x="1234440" y="2413618"/>
+            <a:ext cx="10058400" cy="429370"/>
+          </a:xfrm>
+          <a:prstGeom prst="rect">
+            <a:avLst/>
+          </a:prstGeom>
+          <a:noFill/>
+        </p:spPr>
+        <p:txBody>
+          <a:bodyPr wrap="square" lIns="45720" rIns="45720" tIns="18288" bIns="18288" anchor="t">
+            <a:spAutoFit/>
+          </a:bodyPr>
+          <a:lstStyle/>
+          <a:p>
+            <a:pPr algn="l"/>
+            <a:r>
               <a:rPr sz="2280" b="1" i="0">
                 <a:solidFill>
                   <a:srgbClr val="1A1A1A"/>
@@ -12590,7 +12625,7 @@
       </p:sp>
       <p:pic>
         <p:nvPicPr>
-          <p:cNvPr id="9" name="Picture 8" descr="g5dcf96e4300877f4.png"/>
+          <p:cNvPr id="10" name="Picture 9" descr="g6147afccec220b6d.png"/>
           <p:cNvPicPr>
             <a:picLocks noChangeAspect="1"/>
           </p:cNvPicPr>
@@ -12604,8 +12639,8 @@
         </p:blipFill>
         <p:spPr>
           <a:xfrm>
-            <a:off x="5255185" y="2459338"/>
-            <a:ext cx="1651149" cy="1524490"/>
+            <a:off x="5561221" y="2998436"/>
+            <a:ext cx="1039077" cy="1025320"/>
           </a:xfrm>
           <a:prstGeom prst="rect">
             <a:avLst/>
@@ -12614,13 +12649,13 @@
       </p:pic>
       <p:sp>
         <p:nvSpPr>
-          <p:cNvPr id="10" name="TextBox 9"/>
-          <p:cNvSpPr txBox="1"/>
-          <p:nvPr/>
-        </p:nvSpPr>
-        <p:spPr>
-          <a:xfrm>
-            <a:off x="1874519" y="4221572"/>
+          <p:cNvPr id="11" name="TextBox 10"/>
+          <p:cNvSpPr txBox="1"/>
+          <p:nvPr/>
+        </p:nvSpPr>
+        <p:spPr>
+          <a:xfrm>
+            <a:off x="1874519" y="4261501"/>
             <a:ext cx="4572000" cy="548640"/>
           </a:xfrm>
           <a:prstGeom prst="rect">
@@ -12658,13 +12693,13 @@
       </p:sp>
       <p:sp>
         <p:nvSpPr>
-          <p:cNvPr id="11" name="TextBox 10"/>
-          <p:cNvSpPr txBox="1"/>
-          <p:nvPr/>
-        </p:nvSpPr>
-        <p:spPr>
-          <a:xfrm>
-            <a:off x="6629400" y="4221572"/>
+          <p:cNvPr id="12" name="TextBox 11"/>
+          <p:cNvSpPr txBox="1"/>
+          <p:nvPr/>
+        </p:nvSpPr>
+        <p:spPr>
+          <a:xfrm>
+            <a:off x="6629400" y="4261501"/>
             <a:ext cx="4572000" cy="548640"/>
           </a:xfrm>
           <a:prstGeom prst="rect">
@@ -12702,13 +12737,13 @@
       </p:sp>
       <p:sp>
         <p:nvSpPr>
-          <p:cNvPr id="12" name="TextBox 11"/>
-          <p:cNvSpPr txBox="1"/>
-          <p:nvPr/>
-        </p:nvSpPr>
-        <p:spPr>
-          <a:xfrm>
-            <a:off x="1874519" y="4907372"/>
+          <p:cNvPr id="13" name="TextBox 12"/>
+          <p:cNvSpPr txBox="1"/>
+          <p:nvPr/>
+        </p:nvSpPr>
+        <p:spPr>
+          <a:xfrm>
+            <a:off x="1874519" y="4947301"/>
             <a:ext cx="4572000" cy="548640"/>
           </a:xfrm>
           <a:prstGeom prst="rect">
@@ -12746,13 +12781,13 @@
       </p:sp>
       <p:sp>
         <p:nvSpPr>
-          <p:cNvPr id="13" name="TextBox 12"/>
-          <p:cNvSpPr txBox="1"/>
-          <p:nvPr/>
-        </p:nvSpPr>
-        <p:spPr>
-          <a:xfrm>
-            <a:off x="6629400" y="4907372"/>
+          <p:cNvPr id="14" name="TextBox 13"/>
+          <p:cNvSpPr txBox="1"/>
+          <p:nvPr/>
+        </p:nvSpPr>
+        <p:spPr>
+          <a:xfrm>
+            <a:off x="6629400" y="4947301"/>
             <a:ext cx="4572000" cy="548640"/>
           </a:xfrm>
           <a:prstGeom prst="rect">
@@ -12790,7 +12825,7 @@
       </p:sp>
       <p:sp>
         <p:nvSpPr>
-          <p:cNvPr id="14" name="TextBox 13"/>
+          <p:cNvPr id="15" name="TextBox 14"/>
           <p:cNvSpPr txBox="1"/>
           <p:nvPr/>
         </p:nvSpPr>
@@ -13075,6 +13110,41 @@
           <a:p>
             <a:pPr algn="l"/>
             <a:r>
+              <a:rPr sz="2280" b="0" i="0">
+                <a:solidFill>
+                  <a:srgbClr val="1A1A1A"/>
+                </a:solidFill>
+                <a:latin typeface="Lexend"/>
+              </a:rPr>
+              <a:t>In the figure, lines AD and BE cross at O, and ray OC is drawn.</a:t>
+            </a:r>
+          </a:p>
+        </p:txBody>
+      </p:sp>
+      <p:sp>
+        <p:nvSpPr>
+          <p:cNvPr id="9" name="TextBox 8"/>
+          <p:cNvSpPr txBox="1"/>
+          <p:nvPr/>
+        </p:nvSpPr>
+        <p:spPr>
+          <a:xfrm>
+            <a:off x="1234440" y="2413618"/>
+            <a:ext cx="10058400" cy="429370"/>
+          </a:xfrm>
+          <a:prstGeom prst="rect">
+            <a:avLst/>
+          </a:prstGeom>
+          <a:noFill/>
+        </p:spPr>
+        <p:txBody>
+          <a:bodyPr wrap="square" lIns="45720" rIns="45720" tIns="18288" bIns="18288" anchor="t">
+            <a:spAutoFit/>
+          </a:bodyPr>
+          <a:lstStyle/>
+          <a:p>
+            <a:pPr algn="l"/>
+            <a:r>
               <a:rPr sz="2280" b="1" i="0">
                 <a:solidFill>
                   <a:srgbClr val="1A1A1A"/>
@@ -13088,7 +13158,7 @@
       </p:sp>
       <p:pic>
         <p:nvPicPr>
-          <p:cNvPr id="9" name="Picture 8" descr="gacab42555d0e0284.png"/>
+          <p:cNvPr id="10" name="Picture 9" descr="g7da705629c5ab4b6.png"/>
           <p:cNvPicPr>
             <a:picLocks noChangeAspect="1"/>
           </p:cNvPicPr>
@@ -13102,8 +13172,8 @@
         </p:blipFill>
         <p:spPr>
           <a:xfrm>
-            <a:off x="1950809" y="2459338"/>
-            <a:ext cx="2596896" cy="2287284"/>
+            <a:off x="2097113" y="2998436"/>
+            <a:ext cx="2304288" cy="2029562"/>
           </a:xfrm>
           <a:prstGeom prst="rect">
             <a:avLst/>
@@ -13112,13 +13182,13 @@
       </p:pic>
       <p:sp>
         <p:nvSpPr>
-          <p:cNvPr id="10" name="TextBox 9"/>
-          <p:cNvSpPr txBox="1"/>
-          <p:nvPr/>
-        </p:nvSpPr>
-        <p:spPr>
-          <a:xfrm>
-            <a:off x="5279225" y="3122920"/>
+          <p:cNvPr id="11" name="TextBox 10"/>
+          <p:cNvSpPr txBox="1"/>
+          <p:nvPr/>
+        </p:nvSpPr>
+        <p:spPr>
+          <a:xfrm>
+            <a:off x="5132921" y="3533158"/>
             <a:ext cx="5068645" cy="457200"/>
           </a:xfrm>
           <a:prstGeom prst="rect">
@@ -13147,13 +13217,13 @@
       </p:sp>
       <p:sp>
         <p:nvSpPr>
-          <p:cNvPr id="11" name="TextBox 10"/>
-          <p:cNvSpPr txBox="1"/>
-          <p:nvPr/>
-        </p:nvSpPr>
-        <p:spPr>
-          <a:xfrm>
-            <a:off x="5279225" y="3625840"/>
+          <p:cNvPr id="12" name="TextBox 11"/>
+          <p:cNvSpPr txBox="1"/>
+          <p:nvPr/>
+        </p:nvSpPr>
+        <p:spPr>
+          <a:xfrm>
+            <a:off x="5132921" y="4036078"/>
             <a:ext cx="3091860" cy="457200"/>
           </a:xfrm>
           <a:prstGeom prst="rect">
@@ -13182,13 +13252,13 @@
       </p:sp>
       <p:sp>
         <p:nvSpPr>
-          <p:cNvPr id="12" name="TextBox 11"/>
-          <p:cNvSpPr txBox="1"/>
-          <p:nvPr/>
-        </p:nvSpPr>
-        <p:spPr>
-          <a:xfrm>
-            <a:off x="777240" y="5030086"/>
+          <p:cNvPr id="13" name="TextBox 12"/>
+          <p:cNvSpPr txBox="1"/>
+          <p:nvPr/>
+        </p:nvSpPr>
+        <p:spPr>
+          <a:xfrm>
+            <a:off x="777240" y="5311463"/>
             <a:ext cx="10607040" cy="548640"/>
           </a:xfrm>
           <a:prstGeom prst="rect">
@@ -17634,7 +17704,7 @@
                 </a:solidFill>
                 <a:latin typeface="Lexend"/>
               </a:rPr>
-              <a:t>two angles that add to 180°; a linear pair (adjacent, on a straight line) is supplementary</a:t>
+              <a:t>two angles that add to 180°; a linear pair — two adjacent angles on a straight line — is supplementary</a:t>
             </a:r>
           </a:p>
         </p:txBody>
@@ -18005,7 +18075,7 @@
         <p:spPr>
           <a:xfrm>
             <a:off x="987552" y="5639457"/>
-            <a:ext cx="4645912" cy="457200"/>
+            <a:ext cx="7258644" cy="457200"/>
           </a:xfrm>
           <a:prstGeom prst="rect">
             <a:avLst/>
@@ -18026,7 +18096,7 @@
                 </a:solidFill>
                 <a:latin typeface="Lexend"/>
               </a:rPr>
-              <a:t>Vertical: across, and equal — </a:t>
+              <a:t>Vertical: across, and equal. m means measure: </a:t>
             </a:r>
           </a:p>
         </p:txBody>
@@ -18047,7 +18117,7 @@
         </p:blipFill>
         <p:spPr>
           <a:xfrm>
-            <a:off x="5496304" y="5766370"/>
+            <a:off x="8109036" y="5766370"/>
             <a:ext cx="1526039" cy="215971"/>
           </a:xfrm>
           <a:prstGeom prst="rect">
@@ -18063,8 +18133,8 @@
         </p:nvSpPr>
         <p:spPr>
           <a:xfrm>
-            <a:off x="7022344" y="5639457"/>
-            <a:ext cx="2795967" cy="457200"/>
+            <a:off x="9635076" y="5639457"/>
+            <a:ext cx="285896" cy="457200"/>
           </a:xfrm>
           <a:prstGeom prst="rect">
             <a:avLst/>
@@ -18085,7 +18155,7 @@
                 </a:solidFill>
                 <a:latin typeface="Lexend"/>
               </a:rPr>
-              <a:t> (m for measure).</a:t>
+              <a:t>.</a:t>
             </a:r>
           </a:p>
         </p:txBody>

--- a/a7/build/out/u6/A7 6.T1 Angle Pairs Supplementary, Complementary, Vertical, Adjacent - Slides.pptx
+++ b/a7/build/out/u6/A7 6.T1 Angle Pairs Supplementary, Complementary, Vertical, Adjacent - Slides.pptx
@@ -12577,41 +12577,6 @@
           <a:p>
             <a:pPr algn="l"/>
             <a:r>
-              <a:rPr sz="2280" b="0" i="0">
-                <a:solidFill>
-                  <a:srgbClr val="1A1A1A"/>
-                </a:solidFill>
-                <a:latin typeface="Lexend"/>
-              </a:rPr>
-              <a:t>In the figure, lines AD and BE cross at O, and ray OC is drawn.</a:t>
-            </a:r>
-          </a:p>
-        </p:txBody>
-      </p:sp>
-      <p:sp>
-        <p:nvSpPr>
-          <p:cNvPr id="9" name="TextBox 8"/>
-          <p:cNvSpPr txBox="1"/>
-          <p:nvPr/>
-        </p:nvSpPr>
-        <p:spPr>
-          <a:xfrm>
-            <a:off x="1234440" y="2413618"/>
-            <a:ext cx="10058400" cy="429370"/>
-          </a:xfrm>
-          <a:prstGeom prst="rect">
-            <a:avLst/>
-          </a:prstGeom>
-          <a:noFill/>
-        </p:spPr>
-        <p:txBody>
-          <a:bodyPr wrap="square" lIns="45720" rIns="45720" tIns="18288" bIns="18288" anchor="t">
-            <a:spAutoFit/>
-          </a:bodyPr>
-          <a:lstStyle/>
-          <a:p>
-            <a:pPr algn="l"/>
-            <a:r>
               <a:rPr sz="2280" b="1" i="0">
                 <a:solidFill>
                   <a:srgbClr val="1A1A1A"/>
@@ -12625,7 +12590,7 @@
       </p:sp>
       <p:pic>
         <p:nvPicPr>
-          <p:cNvPr id="10" name="Picture 9" descr="g6147afccec220b6d.png"/>
+          <p:cNvPr id="9" name="Picture 8" descr="g40404b229741d174.png"/>
           <p:cNvPicPr>
             <a:picLocks noChangeAspect="1"/>
           </p:cNvPicPr>
@@ -12639,8 +12604,8 @@
         </p:blipFill>
         <p:spPr>
           <a:xfrm>
-            <a:off x="5561221" y="2998436"/>
-            <a:ext cx="1039077" cy="1025320"/>
+            <a:off x="5255185" y="2459338"/>
+            <a:ext cx="1651149" cy="1576787"/>
           </a:xfrm>
           <a:prstGeom prst="rect">
             <a:avLst/>
@@ -12649,13 +12614,13 @@
       </p:pic>
       <p:sp>
         <p:nvSpPr>
-          <p:cNvPr id="11" name="TextBox 10"/>
-          <p:cNvSpPr txBox="1"/>
-          <p:nvPr/>
-        </p:nvSpPr>
-        <p:spPr>
-          <a:xfrm>
-            <a:off x="1874519" y="4261501"/>
+          <p:cNvPr id="10" name="TextBox 9"/>
+          <p:cNvSpPr txBox="1"/>
+          <p:nvPr/>
+        </p:nvSpPr>
+        <p:spPr>
+          <a:xfrm>
+            <a:off x="1874519" y="4273869"/>
             <a:ext cx="4572000" cy="548640"/>
           </a:xfrm>
           <a:prstGeom prst="rect">
@@ -12693,13 +12658,13 @@
       </p:sp>
       <p:sp>
         <p:nvSpPr>
-          <p:cNvPr id="12" name="TextBox 11"/>
-          <p:cNvSpPr txBox="1"/>
-          <p:nvPr/>
-        </p:nvSpPr>
-        <p:spPr>
-          <a:xfrm>
-            <a:off x="6629400" y="4261501"/>
+          <p:cNvPr id="11" name="TextBox 10"/>
+          <p:cNvSpPr txBox="1"/>
+          <p:nvPr/>
+        </p:nvSpPr>
+        <p:spPr>
+          <a:xfrm>
+            <a:off x="6629400" y="4273869"/>
             <a:ext cx="4572000" cy="548640"/>
           </a:xfrm>
           <a:prstGeom prst="rect">
@@ -12737,13 +12702,13 @@
       </p:sp>
       <p:sp>
         <p:nvSpPr>
-          <p:cNvPr id="13" name="TextBox 12"/>
-          <p:cNvSpPr txBox="1"/>
-          <p:nvPr/>
-        </p:nvSpPr>
-        <p:spPr>
-          <a:xfrm>
-            <a:off x="1874519" y="4947301"/>
+          <p:cNvPr id="12" name="TextBox 11"/>
+          <p:cNvSpPr txBox="1"/>
+          <p:nvPr/>
+        </p:nvSpPr>
+        <p:spPr>
+          <a:xfrm>
+            <a:off x="1874519" y="4959669"/>
             <a:ext cx="4572000" cy="548640"/>
           </a:xfrm>
           <a:prstGeom prst="rect">
@@ -12781,13 +12746,13 @@
       </p:sp>
       <p:sp>
         <p:nvSpPr>
-          <p:cNvPr id="14" name="TextBox 13"/>
-          <p:cNvSpPr txBox="1"/>
-          <p:nvPr/>
-        </p:nvSpPr>
-        <p:spPr>
-          <a:xfrm>
-            <a:off x="6629400" y="4947301"/>
+          <p:cNvPr id="13" name="TextBox 12"/>
+          <p:cNvSpPr txBox="1"/>
+          <p:nvPr/>
+        </p:nvSpPr>
+        <p:spPr>
+          <a:xfrm>
+            <a:off x="6629400" y="4959669"/>
             <a:ext cx="4572000" cy="548640"/>
           </a:xfrm>
           <a:prstGeom prst="rect">
@@ -12825,7 +12790,7 @@
       </p:sp>
       <p:sp>
         <p:nvSpPr>
-          <p:cNvPr id="15" name="TextBox 14"/>
+          <p:cNvPr id="14" name="TextBox 13"/>
           <p:cNvSpPr txBox="1"/>
           <p:nvPr/>
         </p:nvSpPr>
@@ -13110,41 +13075,6 @@
           <a:p>
             <a:pPr algn="l"/>
             <a:r>
-              <a:rPr sz="2280" b="0" i="0">
-                <a:solidFill>
-                  <a:srgbClr val="1A1A1A"/>
-                </a:solidFill>
-                <a:latin typeface="Lexend"/>
-              </a:rPr>
-              <a:t>In the figure, lines AD and BE cross at O, and ray OC is drawn.</a:t>
-            </a:r>
-          </a:p>
-        </p:txBody>
-      </p:sp>
-      <p:sp>
-        <p:nvSpPr>
-          <p:cNvPr id="9" name="TextBox 8"/>
-          <p:cNvSpPr txBox="1"/>
-          <p:nvPr/>
-        </p:nvSpPr>
-        <p:spPr>
-          <a:xfrm>
-            <a:off x="1234440" y="2413618"/>
-            <a:ext cx="10058400" cy="429370"/>
-          </a:xfrm>
-          <a:prstGeom prst="rect">
-            <a:avLst/>
-          </a:prstGeom>
-          <a:noFill/>
-        </p:spPr>
-        <p:txBody>
-          <a:bodyPr wrap="square" lIns="45720" rIns="45720" tIns="18288" bIns="18288" anchor="t">
-            <a:spAutoFit/>
-          </a:bodyPr>
-          <a:lstStyle/>
-          <a:p>
-            <a:pPr algn="l"/>
-            <a:r>
               <a:rPr sz="2280" b="1" i="0">
                 <a:solidFill>
                   <a:srgbClr val="1A1A1A"/>
@@ -13158,7 +13088,7 @@
       </p:sp>
       <p:pic>
         <p:nvPicPr>
-          <p:cNvPr id="10" name="Picture 9" descr="g7da705629c5ab4b6.png"/>
+          <p:cNvPr id="9" name="Picture 8" descr="g7da705629c5ab4b6.png"/>
           <p:cNvPicPr>
             <a:picLocks noChangeAspect="1"/>
           </p:cNvPicPr>
@@ -13172,7 +13102,7 @@
         </p:blipFill>
         <p:spPr>
           <a:xfrm>
-            <a:off x="2097113" y="2998436"/>
+            <a:off x="2097113" y="2459338"/>
             <a:ext cx="2304288" cy="2029562"/>
           </a:xfrm>
           <a:prstGeom prst="rect">
@@ -13182,13 +13112,13 @@
       </p:pic>
       <p:sp>
         <p:nvSpPr>
-          <p:cNvPr id="11" name="TextBox 10"/>
-          <p:cNvSpPr txBox="1"/>
-          <p:nvPr/>
-        </p:nvSpPr>
-        <p:spPr>
-          <a:xfrm>
-            <a:off x="5132921" y="3533158"/>
+          <p:cNvPr id="10" name="TextBox 9"/>
+          <p:cNvSpPr txBox="1"/>
+          <p:nvPr/>
+        </p:nvSpPr>
+        <p:spPr>
+          <a:xfrm>
+            <a:off x="5132921" y="2994059"/>
             <a:ext cx="5068645" cy="457200"/>
           </a:xfrm>
           <a:prstGeom prst="rect">
@@ -13217,13 +13147,13 @@
       </p:sp>
       <p:sp>
         <p:nvSpPr>
-          <p:cNvPr id="12" name="TextBox 11"/>
-          <p:cNvSpPr txBox="1"/>
-          <p:nvPr/>
-        </p:nvSpPr>
-        <p:spPr>
-          <a:xfrm>
-            <a:off x="5132921" y="4036078"/>
+          <p:cNvPr id="11" name="TextBox 10"/>
+          <p:cNvSpPr txBox="1"/>
+          <p:nvPr/>
+        </p:nvSpPr>
+        <p:spPr>
+          <a:xfrm>
+            <a:off x="5132921" y="3496979"/>
             <a:ext cx="3091860" cy="457200"/>
           </a:xfrm>
           <a:prstGeom prst="rect">
@@ -13252,13 +13182,13 @@
       </p:sp>
       <p:sp>
         <p:nvSpPr>
-          <p:cNvPr id="13" name="TextBox 12"/>
-          <p:cNvSpPr txBox="1"/>
-          <p:nvPr/>
-        </p:nvSpPr>
-        <p:spPr>
-          <a:xfrm>
-            <a:off x="777240" y="5311463"/>
+          <p:cNvPr id="12" name="TextBox 11"/>
+          <p:cNvSpPr txBox="1"/>
+          <p:nvPr/>
+        </p:nvSpPr>
+        <p:spPr>
+          <a:xfrm>
+            <a:off x="777240" y="4772364"/>
             <a:ext cx="10607040" cy="548640"/>
           </a:xfrm>
           <a:prstGeom prst="rect">
